--- a/tests/fixtures/templates/Midnight_Executive_30_TemplateOnly.pptx
+++ b/tests/fixtures/templates/Midnight_Executive_30_TemplateOnly.pptx
@@ -6918,6 +6918,218 @@
 </p:sldLayout>
 </file>
 
+<file path=ppt/slideLayouts/slideLayout32.xml><?xml version="1.0" encoding="utf-8"?>
+<p:sldLayout xmlns:a="http://schemas.openxmlformats.org/drawingml/2006/main" xmlns:p="http://schemas.openxmlformats.org/presentationml/2006/main" xmlns:r="http://schemas.openxmlformats.org/officeDocument/2006/relationships" type="obj" preserve="1">
+  <p:cSld name="Content.1Body.Single+1Kicker">
+    <p:spTree>
+      <p:nvGrpSpPr>
+        <p:cNvPr id="1" name=""/>
+        <p:cNvGrpSpPr/>
+        <p:nvPr/>
+      </p:nvGrpSpPr>
+      <p:grpSpPr>
+        <a:xfrm>
+          <a:off x="0" y="0"/>
+          <a:ext cx="0" cy="0"/>
+          <a:chOff x="0" y="0"/>
+          <a:chExt cx="0" cy="0"/>
+        </a:xfrm>
+      </p:grpSpPr>
+      <p:sp>
+        <p:nvSpPr>
+          <p:cNvPr id="2" name="HeaderBar"/>
+          <p:cNvSpPr>
+            <a:spLocks noGrp="1" noSelect="0" noRot="1" noMove="1"/>
+          </p:cNvSpPr>
+          <p:nvPr/>
+        </p:nvSpPr>
+        <p:spPr>
+          <a:xfrm>
+            <a:off x="0" y="0"/>
+            <a:ext cx="12192000" cy="1051560"/>
+          </a:xfrm>
+          <a:prstGeom prst="rect"/>
+          <a:solidFill>
+            <a:srgbClr val="1E2761"/>
+          </a:solidFill>
+          <a:ln>
+            <a:noFill/>
+          </a:ln>
+        </p:spPr>
+      </p:sp>
+      <p:sp>
+        <p:nvSpPr>
+          <p:cNvPr id="3" name="Kicker.Top"/>
+          <p:cNvSpPr>
+            <a:spLocks noGrp="1"/>
+          </p:cNvSpPr>
+          <p:nvPr>
+            <p:ph type="body" idx="40"/>
+          </p:nvPr>
+        </p:nvSpPr>
+        <p:spPr>
+          <a:xfrm>
+            <a:off x="731520" y="54864"/>
+            <a:ext cx="9144000" cy="237744"/>
+          </a:xfrm>
+        </p:spPr>
+        <p:txBody>
+          <a:bodyPr wrap="square" anchor="t" anchorCtr="0"/>
+          <a:lstStyle>
+            <a:defPPr>
+              <a:defRPr sz="1300" b="1">
+                <a:solidFill>
+                  <a:srgbClr val="3B82F6"/>
+                </a:solidFill>
+              </a:defRPr>
+            </a:defPPr>
+          </a:lstStyle>
+          <a:p>
+            <a:r>
+              <a:rPr lang="ja-JP"/>
+              <a:t> </a:t>
+            </a:r>
+          </a:p>
+        </p:txBody>
+      </p:sp>
+      <p:sp>
+        <p:nvSpPr>
+          <p:cNvPr id="4" name="SlideTitle.Header"/>
+          <p:cNvSpPr>
+            <a:spLocks noGrp="1"/>
+          </p:cNvSpPr>
+          <p:nvPr>
+            <p:ph type="body" idx="15"/>
+          </p:nvPr>
+        </p:nvSpPr>
+        <p:spPr>
+          <a:xfrm>
+            <a:off x="731520" y="329184"/>
+            <a:ext cx="9144000" cy="457200"/>
+          </a:xfrm>
+        </p:spPr>
+        <p:txBody>
+          <a:bodyPr wrap="square" anchor="t" anchorCtr="0"/>
+          <a:lstStyle>
+            <a:defPPr>
+              <a:defRPr sz="2800" b="1">
+                <a:solidFill>
+                  <a:srgbClr val="FFFFFF"/>
+                </a:solidFill>
+              </a:defRPr>
+            </a:defPPr>
+          </a:lstStyle>
+          <a:p>
+            <a:r>
+              <a:rPr lang="ja-JP"/>
+              <a:t> </a:t>
+            </a:r>
+          </a:p>
+        </p:txBody>
+      </p:sp>
+      <p:sp>
+        <p:nvSpPr>
+          <p:cNvPr id="5" name="SlideSubtitle.Header"/>
+          <p:cNvSpPr>
+            <a:spLocks noGrp="1"/>
+          </p:cNvSpPr>
+          <p:nvPr>
+            <p:ph type="body" idx="16"/>
+          </p:nvPr>
+        </p:nvSpPr>
+        <p:spPr>
+          <a:xfrm>
+            <a:off x="731520" y="804672"/>
+            <a:ext cx="9144000" cy="228600"/>
+          </a:xfrm>
+        </p:spPr>
+        <p:txBody>
+          <a:bodyPr wrap="square" anchor="t" anchorCtr="0"/>
+          <a:lstStyle>
+            <a:defPPr>
+              <a:defRPr sz="1200">
+                <a:solidFill>
+                  <a:srgbClr val="CADCFC"/>
+                </a:solidFill>
+              </a:defRPr>
+            </a:defPPr>
+          </a:lstStyle>
+          <a:p>
+            <a:r>
+              <a:rPr lang="ja-JP"/>
+              <a:t> </a:t>
+            </a:r>
+          </a:p>
+        </p:txBody>
+      </p:sp>
+      <p:sp>
+        <p:nvSpPr>
+          <p:cNvPr id="6" name="Body.Center"/>
+          <p:cNvSpPr>
+            <a:spLocks noGrp="1"/>
+          </p:cNvSpPr>
+          <p:nvPr>
+            <p:ph type="body" idx="1"/>
+          </p:nvPr>
+        </p:nvSpPr>
+        <p:spPr>
+          <a:xfrm>
+            <a:off x="731520" y="1325880"/>
+            <a:ext cx="10698480" cy="4937760"/>
+          </a:xfrm>
+        </p:spPr>
+        <p:txBody>
+          <a:bodyPr wrap="square" anchor="t" anchorCtr="0"/>
+          <a:lstStyle/>
+          <a:p>
+            <a:r>
+              <a:rPr lang="ja-JP"/>
+              <a:t> </a:t>
+            </a:r>
+          </a:p>
+        </p:txBody>
+      </p:sp>
+      <p:sp>
+        <p:nvSpPr>
+          <p:cNvPr id="7" name="SlideNum.Footer"/>
+          <p:cNvSpPr>
+            <a:spLocks noGrp="1"/>
+          </p:cNvSpPr>
+          <p:nvPr>
+            <p:ph type="sldNum" idx="50"/>
+          </p:nvPr>
+        </p:nvSpPr>
+        <p:spPr>
+          <a:xfrm>
+            <a:off x="10972800" y="6446520"/>
+            <a:ext cx="1097280" cy="274320"/>
+          </a:xfrm>
+        </p:spPr>
+        <p:txBody>
+          <a:bodyPr wrap="square" anchor="t" anchorCtr="0"/>
+          <a:lstStyle>
+            <a:defPPr algn="r">
+              <a:defRPr sz="1000">
+                <a:solidFill>
+                  <a:srgbClr val="94A3B8"/>
+                </a:solidFill>
+              </a:defRPr>
+            </a:defPPr>
+          </a:lstStyle>
+          <a:p>
+            <a:r>
+              <a:rPr lang="ja-JP"/>
+              <a:t> </a:t>
+            </a:r>
+          </a:p>
+        </p:txBody>
+      </p:sp>
+    </p:spTree>
+  </p:cSld>
+  <p:clrMapOvr/>
+</p:sldLayout>
+</file>
+
 <file path=ppt/slideLayouts/slideLayout4.xml><?xml version="1.0" encoding="utf-8"?>
 <p:sldLayout xmlns:a="http://schemas.openxmlformats.org/drawingml/2006/main" xmlns:p="http://schemas.openxmlformats.org/presentationml/2006/main" xmlns:r="http://schemas.openxmlformats.org/officeDocument/2006/relationships" type="secHead" preserve="1">
   <p:cSld name="Section.1Title.Single">
@@ -8482,6 +8694,7 @@
     <p:sldLayoutId id="2147483688" r:id="rId30"/>
     <p:sldLayoutId id="2147483689" r:id="rId31"/>
     <p:sldLayoutId id="2147483690" r:id="rId32"/>
+    <p:sldLayoutId id="2147483691" r:id="rId33"/>
   </p:sldLayoutIdLst>
   <p:txStyles>
     <p:titleStyle>
